--- a/Above All-CH.pptx
+++ b/Above All-CH.pptx
@@ -266,7 +266,7 @@
           <a:p>
             <a:fld id="{E759A0DE-F190-5444-87AC-4719D5F20D15}" type="datetimeFigureOut">
               <a:rPr lang="en-US" smtClean="0"/>
-              <a:t>7/19/26</a:t>
+              <a:t>10/8/26</a:t>
             </a:fld>
             <a:endParaRPr lang="en-US"/>
           </a:p>
@@ -464,7 +464,7 @@
           <a:p>
             <a:fld id="{E759A0DE-F190-5444-87AC-4719D5F20D15}" type="datetimeFigureOut">
               <a:rPr lang="en-US" smtClean="0"/>
-              <a:t>7/19/26</a:t>
+              <a:t>10/8/26</a:t>
             </a:fld>
             <a:endParaRPr lang="en-US"/>
           </a:p>
@@ -672,7 +672,7 @@
           <a:p>
             <a:fld id="{E759A0DE-F190-5444-87AC-4719D5F20D15}" type="datetimeFigureOut">
               <a:rPr lang="en-US" smtClean="0"/>
-              <a:t>7/19/26</a:t>
+              <a:t>10/8/26</a:t>
             </a:fld>
             <a:endParaRPr lang="en-US"/>
           </a:p>
@@ -870,7 +870,7 @@
           <a:p>
             <a:fld id="{E759A0DE-F190-5444-87AC-4719D5F20D15}" type="datetimeFigureOut">
               <a:rPr lang="en-US" smtClean="0"/>
-              <a:t>7/19/26</a:t>
+              <a:t>10/8/26</a:t>
             </a:fld>
             <a:endParaRPr lang="en-US"/>
           </a:p>
@@ -1145,7 +1145,7 @@
           <a:p>
             <a:fld id="{E759A0DE-F190-5444-87AC-4719D5F20D15}" type="datetimeFigureOut">
               <a:rPr lang="en-US" smtClean="0"/>
-              <a:t>7/19/26</a:t>
+              <a:t>10/8/26</a:t>
             </a:fld>
             <a:endParaRPr lang="en-US"/>
           </a:p>
@@ -1410,7 +1410,7 @@
           <a:p>
             <a:fld id="{E759A0DE-F190-5444-87AC-4719D5F20D15}" type="datetimeFigureOut">
               <a:rPr lang="en-US" smtClean="0"/>
-              <a:t>7/19/26</a:t>
+              <a:t>10/8/26</a:t>
             </a:fld>
             <a:endParaRPr lang="en-US"/>
           </a:p>
@@ -1822,7 +1822,7 @@
           <a:p>
             <a:fld id="{E759A0DE-F190-5444-87AC-4719D5F20D15}" type="datetimeFigureOut">
               <a:rPr lang="en-US" smtClean="0"/>
-              <a:t>7/19/26</a:t>
+              <a:t>10/8/26</a:t>
             </a:fld>
             <a:endParaRPr lang="en-US"/>
           </a:p>
@@ -1963,7 +1963,7 @@
           <a:p>
             <a:fld id="{E759A0DE-F190-5444-87AC-4719D5F20D15}" type="datetimeFigureOut">
               <a:rPr lang="en-US" smtClean="0"/>
-              <a:t>7/19/26</a:t>
+              <a:t>10/8/26</a:t>
             </a:fld>
             <a:endParaRPr lang="en-US"/>
           </a:p>
@@ -2076,7 +2076,7 @@
           <a:p>
             <a:fld id="{E759A0DE-F190-5444-87AC-4719D5F20D15}" type="datetimeFigureOut">
               <a:rPr lang="en-US" smtClean="0"/>
-              <a:t>7/19/26</a:t>
+              <a:t>10/8/26</a:t>
             </a:fld>
             <a:endParaRPr lang="en-US"/>
           </a:p>
@@ -2387,7 +2387,7 @@
           <a:p>
             <a:fld id="{E759A0DE-F190-5444-87AC-4719D5F20D15}" type="datetimeFigureOut">
               <a:rPr lang="en-US" smtClean="0"/>
-              <a:t>7/19/26</a:t>
+              <a:t>10/8/26</a:t>
             </a:fld>
             <a:endParaRPr lang="en-US"/>
           </a:p>
@@ -2675,7 +2675,7 @@
           <a:p>
             <a:fld id="{E759A0DE-F190-5444-87AC-4719D5F20D15}" type="datetimeFigureOut">
               <a:rPr lang="en-US" smtClean="0"/>
-              <a:t>7/19/26</a:t>
+              <a:t>10/8/26</a:t>
             </a:fld>
             <a:endParaRPr lang="en-US"/>
           </a:p>
@@ -2916,7 +2916,7 @@
           <a:p>
             <a:fld id="{E759A0DE-F190-5444-87AC-4719D5F20D15}" type="datetimeFigureOut">
               <a:rPr lang="en-US" smtClean="0"/>
-              <a:t>7/19/26</a:t>
+              <a:t>10/8/26</a:t>
             </a:fld>
             <a:endParaRPr lang="en-US"/>
           </a:p>
@@ -4229,6 +4229,49 @@
           </a:p>
         </p:txBody>
       </p:sp>
+      <p:sp>
+        <p:nvSpPr>
+          <p:cNvPr id="2" name="TextBox 1">
+            <a:extLst>
+              <a:ext uri="{FF2B5EF4-FFF2-40B4-BE49-F238E27FC236}">
+                <a16:creationId xmlns:a16="http://schemas.microsoft.com/office/drawing/2014/main" id="{A1F8786E-AB5D-FB01-3900-6AE0A12CDE8B}"/>
+              </a:ext>
+            </a:extLst>
+          </p:cNvPr>
+          <p:cNvSpPr txBox="1"/>
+          <p:nvPr/>
+        </p:nvSpPr>
+        <p:spPr>
+          <a:xfrm>
+            <a:off x="8928101" y="6150114"/>
+            <a:ext cx="3263900" cy="707886"/>
+          </a:xfrm>
+          <a:prstGeom prst="rect">
+            <a:avLst/>
+          </a:prstGeom>
+          <a:noFill/>
+        </p:spPr>
+        <p:txBody>
+          <a:bodyPr wrap="square" rtlCol="0">
+            <a:spAutoFit/>
+          </a:bodyPr>
+          <a:lstStyle/>
+          <a:p>
+            <a:pPr algn="r"/>
+            <a:r>
+              <a:rPr lang="en-US" sz="4000" b="1" dirty="0">
+                <a:solidFill>
+                  <a:schemeClr val="accent1">
+                    <a:lumMod val="20000"/>
+                    <a:lumOff val="80000"/>
+                  </a:schemeClr>
+                </a:solidFill>
+              </a:rPr>
+              <a:t>To CHORUS</a:t>
+            </a:r>
+          </a:p>
+        </p:txBody>
+      </p:sp>
     </p:spTree>
     <p:extLst>
       <p:ext uri="{BB962C8B-B14F-4D97-AF65-F5344CB8AC3E}">
@@ -4418,6 +4461,49 @@
           </a:p>
         </p:txBody>
       </p:sp>
+      <p:sp>
+        <p:nvSpPr>
+          <p:cNvPr id="2" name="TextBox 1">
+            <a:extLst>
+              <a:ext uri="{FF2B5EF4-FFF2-40B4-BE49-F238E27FC236}">
+                <a16:creationId xmlns:a16="http://schemas.microsoft.com/office/drawing/2014/main" id="{B0BF607B-B566-735C-A45B-5846B90E69B6}"/>
+              </a:ext>
+            </a:extLst>
+          </p:cNvPr>
+          <p:cNvSpPr txBox="1"/>
+          <p:nvPr/>
+        </p:nvSpPr>
+        <p:spPr>
+          <a:xfrm>
+            <a:off x="8928101" y="6150114"/>
+            <a:ext cx="3263900" cy="707886"/>
+          </a:xfrm>
+          <a:prstGeom prst="rect">
+            <a:avLst/>
+          </a:prstGeom>
+          <a:noFill/>
+        </p:spPr>
+        <p:txBody>
+          <a:bodyPr wrap="square" rtlCol="0">
+            <a:spAutoFit/>
+          </a:bodyPr>
+          <a:lstStyle/>
+          <a:p>
+            <a:pPr algn="r"/>
+            <a:r>
+              <a:rPr lang="en-US" sz="4000" b="1" dirty="0">
+                <a:solidFill>
+                  <a:schemeClr val="accent1">
+                    <a:lumMod val="20000"/>
+                    <a:lumOff val="80000"/>
+                  </a:schemeClr>
+                </a:solidFill>
+              </a:rPr>
+              <a:t>To VERSE</a:t>
+            </a:r>
+          </a:p>
+        </p:txBody>
+      </p:sp>
     </p:spTree>
     <p:extLst>
       <p:ext uri="{BB962C8B-B14F-4D97-AF65-F5344CB8AC3E}">
@@ -4788,6 +4874,49 @@
                 <a:ea typeface="Bodoni Ornaments" pitchFamily="2" charset="0"/>
               </a:rPr>
               <a:t>There's no way to measure what You're worth</a:t>
+            </a:r>
+          </a:p>
+        </p:txBody>
+      </p:sp>
+      <p:sp>
+        <p:nvSpPr>
+          <p:cNvPr id="2" name="TextBox 1">
+            <a:extLst>
+              <a:ext uri="{FF2B5EF4-FFF2-40B4-BE49-F238E27FC236}">
+                <a16:creationId xmlns:a16="http://schemas.microsoft.com/office/drawing/2014/main" id="{5A6BE855-E3C4-7FB0-590E-4FF25D76F818}"/>
+              </a:ext>
+            </a:extLst>
+          </p:cNvPr>
+          <p:cNvSpPr txBox="1"/>
+          <p:nvPr/>
+        </p:nvSpPr>
+        <p:spPr>
+          <a:xfrm>
+            <a:off x="8928101" y="6150114"/>
+            <a:ext cx="3263900" cy="707886"/>
+          </a:xfrm>
+          <a:prstGeom prst="rect">
+            <a:avLst/>
+          </a:prstGeom>
+          <a:noFill/>
+        </p:spPr>
+        <p:txBody>
+          <a:bodyPr wrap="square" rtlCol="0">
+            <a:spAutoFit/>
+          </a:bodyPr>
+          <a:lstStyle/>
+          <a:p>
+            <a:pPr algn="r"/>
+            <a:r>
+              <a:rPr lang="en-US" sz="4000" b="1" dirty="0">
+                <a:solidFill>
+                  <a:schemeClr val="accent1">
+                    <a:lumMod val="20000"/>
+                    <a:lumOff val="80000"/>
+                  </a:schemeClr>
+                </a:solidFill>
+              </a:rPr>
+              <a:t>To CHORUS</a:t>
             </a:r>
           </a:p>
         </p:txBody>
